--- a/yunqi-2026-agenda-201/docs/洞察一页-09-容器服务 Agent 服务全场景最佳实践.pptx
+++ b/yunqi-2026-agenda-201/docs/洞察一页-09-容器服务 Agent 服务全场景最佳实践.pptx
@@ -3141,7 +3141,7 @@
         <p:spPr>
           <a:xfrm>
             <a:off x="0" y="0"/>
-            <a:ext cx="12191695" cy="1051560"/>
+            <a:ext cx="12191695" cy="1097280"/>
           </a:xfrm>
           <a:prstGeom prst="rect">
             <a:avLst/>
@@ -3183,8 +3183,8 @@
         </p:nvSpPr>
         <p:spPr>
           <a:xfrm>
-            <a:off x="365760" y="146304"/>
-            <a:ext cx="11430000" cy="274320"/>
+            <a:off x="320040" y="91440"/>
+            <a:ext cx="11521440" cy="237744"/>
           </a:xfrm>
           <a:prstGeom prst="rect">
             <a:avLst/>
@@ -3199,7 +3199,7 @@
           <a:p>
             <a:pPr algn="l"/>
             <a:r>
-              <a:rPr sz="1300" b="0">
+              <a:rPr sz="1200" b="0">
                 <a:solidFill>
                   <a:srgbClr val="6B6B6B"/>
                 </a:solidFill>
@@ -3219,8 +3219,8 @@
         </p:nvSpPr>
         <p:spPr>
           <a:xfrm>
-            <a:off x="365760" y="420624"/>
-            <a:ext cx="11430000" cy="502920"/>
+            <a:off x="320040" y="347472"/>
+            <a:ext cx="11521440" cy="658368"/>
           </a:xfrm>
           <a:prstGeom prst="rect">
             <a:avLst/>
@@ -3235,7 +3235,7 @@
           <a:p>
             <a:pPr algn="l"/>
             <a:r>
-              <a:rPr sz="2000" b="1">
+              <a:rPr sz="1600" b="1">
                 <a:solidFill>
                   <a:srgbClr val="1A1A1A"/>
                 </a:solidFill>
@@ -3255,8 +3255,8 @@
         </p:nvSpPr>
         <p:spPr>
           <a:xfrm>
-            <a:off x="320040" y="1207008"/>
-            <a:ext cx="11521440" cy="502920"/>
+            <a:off x="274320" y="1207008"/>
+            <a:ext cx="11612880" cy="749808"/>
           </a:xfrm>
           <a:prstGeom prst="rect">
             <a:avLst/>
@@ -3300,8 +3300,8 @@
         </p:nvSpPr>
         <p:spPr>
           <a:xfrm>
-            <a:off x="457200" y="1298448"/>
-            <a:ext cx="11247120" cy="365760"/>
+            <a:off x="411480" y="1261872"/>
+            <a:ext cx="11338560" cy="640080"/>
           </a:xfrm>
           <a:prstGeom prst="rect">
             <a:avLst/>
@@ -3316,14 +3316,14 @@
           <a:p>
             <a:pPr algn="l"/>
             <a:r>
-              <a:rPr sz="1300" b="1">
+              <a:rPr sz="1200" b="1">
                 <a:solidFill>
                   <a:srgbClr val="1A1A1A"/>
                 </a:solidFill>
                 <a:latin typeface="Microsoft YaHei"/>
                 <a:ea typeface="Microsoft YaHei"/>
               </a:rPr>
-              <a:t>一句话判断：胡光介绍容器服务 Agent：面向 Kubernetes 的自主智能运维，覆盖 Day0 集群设计到 DayN 自治协同全生命周期。以 Multi-Agent + Plan-Execute/ReAct + Human-…</a:t>
+              <a:t>一句话判断：胡光介绍容器服务 Agent：面向 Kubernetes 的自主智能运维，覆盖 Day0 集群设计到 DayN 自治协同全生命周期。</a:t>
             </a:r>
           </a:p>
         </p:txBody>
@@ -3336,8 +3336,8 @@
         </p:nvSpPr>
         <p:spPr>
           <a:xfrm>
-            <a:off x="320040" y="1874519"/>
-            <a:ext cx="3703320" cy="2606040"/>
+            <a:off x="274320" y="2084831"/>
+            <a:ext cx="3749039" cy="2267712"/>
           </a:xfrm>
           <a:prstGeom prst="rect">
             <a:avLst/>
@@ -3381,8 +3381,8 @@
         </p:nvSpPr>
         <p:spPr>
           <a:xfrm>
-            <a:off x="457200" y="2011679"/>
-            <a:ext cx="3429000" cy="320040"/>
+            <a:off x="402336" y="2176271"/>
+            <a:ext cx="3493007" cy="292608"/>
           </a:xfrm>
           <a:prstGeom prst="rect">
             <a:avLst/>
@@ -3397,14 +3397,14 @@
           <a:p>
             <a:pPr algn="l"/>
             <a:r>
-              <a:rPr sz="1500" b="1">
+              <a:rPr sz="1400" b="1">
                 <a:solidFill>
                   <a:srgbClr val="8B1A2B"/>
                 </a:solidFill>
                 <a:latin typeface="Microsoft YaHei"/>
                 <a:ea typeface="Microsoft YaHei"/>
               </a:rPr>
-              <a:t>01  智能体自治时代：容器服务 Ag…</a:t>
+              <a:t>01  容器服务 Agent 全场景定位</a:t>
             </a:r>
           </a:p>
         </p:txBody>
@@ -3417,8 +3417,8 @@
         </p:nvSpPr>
         <p:spPr>
           <a:xfrm>
-            <a:off x="484632" y="2377439"/>
-            <a:ext cx="3374136" cy="1965960"/>
+            <a:off x="402336" y="2487167"/>
+            <a:ext cx="3493007" cy="1764792"/>
           </a:xfrm>
           <a:prstGeom prst="rect">
             <a:avLst/>
@@ -3433,28 +3433,45 @@
           <a:p>
             <a:pPr algn="l">
               <a:spcAft>
-                <a:spcPts val="400"/>
+                <a:spcPts val="200"/>
               </a:spcAft>
             </a:pPr>
             <a:r>
-              <a:rPr sz="1200" b="1">
+              <a:rPr sz="1100" b="1">
                 <a:solidFill>
                   <a:srgbClr val="1A1A1A"/>
                 </a:solidFill>
                 <a:latin typeface="Microsoft YaHei"/>
                 <a:ea typeface="Microsoft YaHei"/>
               </a:rPr>
-              <a:t>标题主张：智能体自治时代，用智能重塑基础设施运维。</a:t>
+              <a:t>HCS 应把「容器运维 Agent」列为独立产品能力，对标客户超大规模集群运维痛点（稳定/自动/安全/成本），避免只做通用大模型对话入口。</a:t>
             </a:r>
           </a:p>
           <a:p>
             <a:pPr algn="l">
               <a:spcAft>
-                <a:spcPts val="400"/>
+                <a:spcPts val="200"/>
               </a:spcAft>
             </a:pPr>
             <a:r>
-              <a:rPr sz="1200" b="0">
+              <a:rPr sz="1100" b="0">
+                <a:solidFill>
+                  <a:srgbClr val="4A4A4A"/>
+                </a:solidFill>
+                <a:latin typeface="Microsoft YaHei"/>
+                <a:ea typeface="Microsoft YaHei"/>
+              </a:rPr>
+              <a:t>• 标题主张：智能体自治时代，用智能重塑基础设施运维。</a:t>
+            </a:r>
+          </a:p>
+          <a:p>
+            <a:pPr algn="l">
+              <a:spcAft>
+                <a:spcPts val="200"/>
+              </a:spcAft>
+            </a:pPr>
+            <a:r>
+              <a:rPr sz="1100" b="0">
                 <a:solidFill>
                   <a:srgbClr val="4A4A4A"/>
                 </a:solidFill>
@@ -3474,8 +3491,8 @@
         </p:nvSpPr>
         <p:spPr>
           <a:xfrm>
-            <a:off x="4224528" y="1874519"/>
-            <a:ext cx="3703320" cy="2606040"/>
+            <a:off x="4187951" y="2084831"/>
+            <a:ext cx="3749039" cy="2267712"/>
           </a:xfrm>
           <a:prstGeom prst="rect">
             <a:avLst/>
@@ -3519,8 +3536,8 @@
         </p:nvSpPr>
         <p:spPr>
           <a:xfrm>
-            <a:off x="4361688" y="2011679"/>
-            <a:ext cx="3429000" cy="320040"/>
+            <a:off x="4315967" y="2176271"/>
+            <a:ext cx="3493007" cy="292608"/>
           </a:xfrm>
           <a:prstGeom prst="rect">
             <a:avLst/>
@@ -3535,14 +3552,14 @@
           <a:p>
             <a:pPr algn="l"/>
             <a:r>
-              <a:rPr sz="1500" b="1">
+              <a:rPr sz="1400" b="1">
                 <a:solidFill>
                   <a:srgbClr val="8B1A2B"/>
                 </a:solidFill>
                 <a:latin typeface="Microsoft YaHei"/>
                 <a:ea typeface="Microsoft YaHei"/>
               </a:rPr>
-              <a:t>02  超大规模集群运维四关注点与行业…</a:t>
+              <a:t>02  超大规模集群运维四关注点与行业背景</a:t>
             </a:r>
           </a:p>
         </p:txBody>
@@ -3555,8 +3572,8 @@
         </p:nvSpPr>
         <p:spPr>
           <a:xfrm>
-            <a:off x="4389120" y="2377439"/>
-            <a:ext cx="3374136" cy="1965960"/>
+            <a:off x="4315967" y="2487167"/>
+            <a:ext cx="3493007" cy="1764792"/>
           </a:xfrm>
           <a:prstGeom prst="rect">
             <a:avLst/>
@@ -3571,28 +3588,45 @@
           <a:p>
             <a:pPr algn="l">
               <a:spcAft>
-                <a:spcPts val="400"/>
+                <a:spcPts val="200"/>
               </a:spcAft>
             </a:pPr>
             <a:r>
-              <a:rPr sz="1200" b="1">
+              <a:rPr sz="1100" b="1">
                 <a:solidFill>
                   <a:srgbClr val="1A1A1A"/>
                 </a:solidFill>
                 <a:latin typeface="Microsoft YaHei"/>
                 <a:ea typeface="Microsoft YaHei"/>
               </a:rPr>
-              <a:t>稳定：偶发异常处置慢，缺长效降风险机制。</a:t>
+              <a:t>规划输入可直接采用「稳定/自动/安全/成本」四象限作为 HCS 运维 Agent 需求基线</a:t>
             </a:r>
           </a:p>
           <a:p>
             <a:pPr algn="l">
               <a:spcAft>
-                <a:spcPts val="400"/>
+                <a:spcPts val="200"/>
               </a:spcAft>
             </a:pPr>
             <a:r>
-              <a:rPr sz="1200" b="0">
+              <a:rPr sz="1100" b="0">
+                <a:solidFill>
+                  <a:srgbClr val="4A4A4A"/>
+                </a:solidFill>
+                <a:latin typeface="Microsoft YaHei"/>
+                <a:ea typeface="Microsoft YaHei"/>
+              </a:rPr>
+              <a:t>• 稳定：偶发异常处置慢，缺长效降风险机制。</a:t>
+            </a:r>
+          </a:p>
+          <a:p>
+            <a:pPr algn="l">
+              <a:spcAft>
+                <a:spcPts val="200"/>
+              </a:spcAft>
+            </a:pPr>
+            <a:r>
+              <a:rPr sz="1100" b="0">
                 <a:solidFill>
                   <a:srgbClr val="4A4A4A"/>
                 </a:solidFill>
@@ -3605,11 +3639,11 @@
           <a:p>
             <a:pPr algn="l">
               <a:spcAft>
-                <a:spcPts val="400"/>
+                <a:spcPts val="200"/>
               </a:spcAft>
             </a:pPr>
             <a:r>
-              <a:rPr sz="1200" b="0">
+              <a:rPr sz="1100" b="0">
                 <a:solidFill>
                   <a:srgbClr val="4A4A4A"/>
                 </a:solidFill>
@@ -3619,23 +3653,6 @@
               <a:t>• 安全：CVE/配置/运行时风险缺统一视角。</a:t>
             </a:r>
           </a:p>
-          <a:p>
-            <a:pPr algn="l">
-              <a:spcAft>
-                <a:spcPts val="400"/>
-              </a:spcAft>
-            </a:pPr>
-            <a:r>
-              <a:rPr sz="1200" b="0">
-                <a:solidFill>
-                  <a:srgbClr val="4A4A4A"/>
-                </a:solidFill>
-                <a:latin typeface="Microsoft YaHei"/>
-                <a:ea typeface="Microsoft YaHei"/>
-              </a:rPr>
-              <a:t>• 成本：治理周期长，闲置浪费难归因到人；行业侧 66% 组织用 K8s 托管 GenAI，82% 容器用户生产用 K8s，安全事件普遍。</a:t>
-            </a:r>
-          </a:p>
         </p:txBody>
       </p:sp>
       <p:sp>
@@ -3646,8 +3663,8 @@
         </p:nvSpPr>
         <p:spPr>
           <a:xfrm>
-            <a:off x="8129016" y="1874519"/>
-            <a:ext cx="3703320" cy="2606040"/>
+            <a:off x="8101582" y="2084831"/>
+            <a:ext cx="3749039" cy="2267712"/>
           </a:xfrm>
           <a:prstGeom prst="rect">
             <a:avLst/>
@@ -3691,8 +3708,8 @@
         </p:nvSpPr>
         <p:spPr>
           <a:xfrm>
-            <a:off x="8266176" y="2011679"/>
-            <a:ext cx="3429000" cy="320040"/>
+            <a:off x="8229598" y="2176271"/>
+            <a:ext cx="3493007" cy="292608"/>
           </a:xfrm>
           <a:prstGeom prst="rect">
             <a:avLst/>
@@ -3707,14 +3724,14 @@
           <a:p>
             <a:pPr algn="l"/>
             <a:r>
-              <a:rPr sz="1500" b="1">
+              <a:rPr sz="1400" b="1">
                 <a:solidFill>
                   <a:srgbClr val="8B1A2B"/>
                 </a:solidFill>
                 <a:latin typeface="Microsoft YaHei"/>
                 <a:ea typeface="Microsoft YaHei"/>
               </a:rPr>
-              <a:t>03  容器服务 Agent：自主智能…</a:t>
+              <a:t>03  自主智能运维架构</a:t>
             </a:r>
           </a:p>
         </p:txBody>
@@ -3727,8 +3744,8 @@
         </p:nvSpPr>
         <p:spPr>
           <a:xfrm>
-            <a:off x="8293608" y="2377439"/>
-            <a:ext cx="3374136" cy="1965960"/>
+            <a:off x="8229598" y="2487167"/>
+            <a:ext cx="3493007" cy="1764792"/>
           </a:xfrm>
           <a:prstGeom prst="rect">
             <a:avLst/>
@@ -3743,52 +3760,69 @@
           <a:p>
             <a:pPr algn="l">
               <a:spcAft>
-                <a:spcPts val="400"/>
+                <a:spcPts val="200"/>
               </a:spcAft>
             </a:pPr>
             <a:r>
-              <a:rPr sz="1200" b="1">
+              <a:rPr sz="1100" b="1">
                 <a:solidFill>
                   <a:srgbClr val="1A1A1A"/>
                 </a:solidFill>
                 <a:latin typeface="Microsoft YaHei"/>
                 <a:ea typeface="Microsoft YaHei"/>
               </a:rPr>
-              <a:t>能力层：自动异常感知（200+ 分析）、规划部署、智能诊断修复、安全治理、7×24…</a:t>
+              <a:t>HCS 应建设「MCP 工具集 + 领域知识库 + 护栏审批」三段式运维 Agent</a:t>
             </a:r>
           </a:p>
           <a:p>
             <a:pPr algn="l">
               <a:spcAft>
-                <a:spcPts val="400"/>
+                <a:spcPts val="200"/>
               </a:spcAft>
             </a:pPr>
             <a:r>
-              <a:rPr sz="1200" b="0">
+              <a:rPr sz="1100" b="0">
                 <a:solidFill>
                   <a:srgbClr val="4A4A4A"/>
                 </a:solidFill>
                 <a:latin typeface="Microsoft YaHei"/>
                 <a:ea typeface="Microsoft YaHei"/>
               </a:rPr>
-              <a:t>• 中枢：多智能体协作、任务规划编排、Skills/MCP 可扩展、Routines/Channels、安全护栏与审批、持续自动评测。</a:t>
+              <a:t>• 能力层：自动异常感知（200+ 分析）、规划部署、智能诊断修复、安全治理、7×24 自主运维、集群优化。</a:t>
             </a:r>
           </a:p>
           <a:p>
             <a:pPr algn="l">
               <a:spcAft>
-                <a:spcPts val="400"/>
+                <a:spcPts val="200"/>
               </a:spcAft>
             </a:pPr>
             <a:r>
-              <a:rPr sz="1200" b="0">
+              <a:rPr sz="1100" b="0">
                 <a:solidFill>
                   <a:srgbClr val="4A4A4A"/>
                 </a:solidFill>
                 <a:latin typeface="Microsoft YaHei"/>
                 <a:ea typeface="Microsoft YaHei"/>
               </a:rPr>
-              <a:t>• 底座：ACK MCP Servers（资源/集群/可观测成本/故障诊断）+ ACK 知识库 + 云资源 MCP/CLI。</a:t>
+              <a:t>• 中枢：多智能体协作、任务规划编排、Skills/MCP 可扩展、Routines/Channels、安全护栏与审批、持续自动评测</a:t>
+            </a:r>
+          </a:p>
+          <a:p>
+            <a:pPr algn="l">
+              <a:spcAft>
+                <a:spcPts val="200"/>
+              </a:spcAft>
+            </a:pPr>
+            <a:r>
+              <a:rPr sz="1100" b="0">
+                <a:solidFill>
+                  <a:srgbClr val="4A4A4A"/>
+                </a:solidFill>
+                <a:latin typeface="Microsoft YaHei"/>
+                <a:ea typeface="Microsoft YaHei"/>
+              </a:rPr>
+              <a:t>• 底座：ACK MCP Servers（资源/集群/可观测成本/故障诊断）+ ACK 知识库 + 云资源 MCP/CLI</a:t>
             </a:r>
           </a:p>
         </p:txBody>
@@ -3801,8 +3835,8 @@
         </p:nvSpPr>
         <p:spPr>
           <a:xfrm>
-            <a:off x="320040" y="4617720"/>
-            <a:ext cx="7315200" cy="256032"/>
+            <a:off x="274320" y="4553712"/>
+            <a:ext cx="7315200" cy="237744"/>
           </a:xfrm>
           <a:prstGeom prst="rect">
             <a:avLst/>
@@ -3817,7 +3851,7 @@
           <a:p>
             <a:pPr algn="l"/>
             <a:r>
-              <a:rPr sz="1400" b="1">
+              <a:rPr sz="1300" b="1">
                 <a:solidFill>
                   <a:srgbClr val="1A1A1A"/>
                 </a:solidFill>
@@ -3837,8 +3871,8 @@
         </p:nvSpPr>
         <p:spPr>
           <a:xfrm>
-            <a:off x="320040" y="4910328"/>
-            <a:ext cx="1847088" cy="868680"/>
+            <a:off x="274320" y="4809744"/>
+            <a:ext cx="1874519" cy="960120"/>
           </a:xfrm>
           <a:prstGeom prst="rect">
             <a:avLst/>
@@ -3882,8 +3916,8 @@
         </p:nvSpPr>
         <p:spPr>
           <a:xfrm>
-            <a:off x="429768" y="4965192"/>
-            <a:ext cx="1664208" cy="201168"/>
+            <a:off x="365760" y="4864608"/>
+            <a:ext cx="1709927" cy="201168"/>
           </a:xfrm>
           <a:prstGeom prst="rect">
             <a:avLst/>
@@ -3905,7 +3939,7 @@
                 <a:latin typeface="Microsoft YaHei"/>
                 <a:ea typeface="Microsoft YaHei"/>
               </a:rPr>
-              <a:t>智能体自治时代：容器服…</a:t>
+              <a:t>定位</a:t>
             </a:r>
           </a:p>
         </p:txBody>
@@ -3918,8 +3952,8 @@
         </p:nvSpPr>
         <p:spPr>
           <a:xfrm>
-            <a:off x="429768" y="5166360"/>
-            <a:ext cx="1664208" cy="237744"/>
+            <a:off x="365760" y="5065776"/>
+            <a:ext cx="1709927" cy="256032"/>
           </a:xfrm>
           <a:prstGeom prst="rect">
             <a:avLst/>
@@ -3941,7 +3975,7 @@
                 <a:latin typeface="Microsoft YaHei"/>
                 <a:ea typeface="Microsoft YaHei"/>
               </a:rPr>
-              <a:t>标题主张：智能体自治时代，用智…</a:t>
+              <a:t>演讲口径</a:t>
             </a:r>
           </a:p>
         </p:txBody>
@@ -3954,8 +3988,8 @@
         </p:nvSpPr>
         <p:spPr>
           <a:xfrm>
-            <a:off x="429768" y="5413248"/>
-            <a:ext cx="1664208" cy="292608"/>
+            <a:off x="365760" y="5340096"/>
+            <a:ext cx="1709927" cy="365760"/>
           </a:xfrm>
           <a:prstGeom prst="rect">
             <a:avLst/>
@@ -3970,14 +4004,14 @@
           <a:p>
             <a:pPr algn="l"/>
             <a:r>
-              <a:rPr sz="1400" b="1">
+              <a:rPr sz="1200" b="1">
                 <a:solidFill>
                   <a:srgbClr val="8B1A2B"/>
                 </a:solidFill>
                 <a:latin typeface="Microsoft YaHei"/>
                 <a:ea typeface="Microsoft YaHei"/>
               </a:rPr>
-              <a:t>定位：全场景容器运维 Agent</a:t>
+              <a:t>全场景容器运维 Agent</a:t>
             </a:r>
           </a:p>
         </p:txBody>
@@ -3990,8 +4024,8 @@
         </p:nvSpPr>
         <p:spPr>
           <a:xfrm>
-            <a:off x="2276856" y="4910328"/>
-            <a:ext cx="1847088" cy="868680"/>
+            <a:off x="2240279" y="4809744"/>
+            <a:ext cx="1874519" cy="960120"/>
           </a:xfrm>
           <a:prstGeom prst="rect">
             <a:avLst/>
@@ -4035,8 +4069,8 @@
         </p:nvSpPr>
         <p:spPr>
           <a:xfrm>
-            <a:off x="2386584" y="4965192"/>
-            <a:ext cx="1664208" cy="201168"/>
+            <a:off x="2331719" y="4864608"/>
+            <a:ext cx="1709927" cy="201168"/>
           </a:xfrm>
           <a:prstGeom prst="rect">
             <a:avLst/>
@@ -4058,7 +4092,7 @@
                 <a:latin typeface="Microsoft YaHei"/>
                 <a:ea typeface="Microsoft YaHei"/>
               </a:rPr>
-              <a:t>超大规模集群运维四关注…</a:t>
+              <a:t>超大规模集群运维四关注点与行业背景</a:t>
             </a:r>
           </a:p>
         </p:txBody>
@@ -4071,8 +4105,8 @@
         </p:nvSpPr>
         <p:spPr>
           <a:xfrm>
-            <a:off x="2386584" y="5166360"/>
-            <a:ext cx="1664208" cy="237744"/>
+            <a:off x="2331719" y="5065776"/>
+            <a:ext cx="1709927" cy="256032"/>
           </a:xfrm>
           <a:prstGeom prst="rect">
             <a:avLst/>
@@ -4094,7 +4128,7 @@
                 <a:latin typeface="Microsoft YaHei"/>
                 <a:ea typeface="Microsoft YaHei"/>
               </a:rPr>
-              <a:t>82% 容器用户生产部署 K8s</a:t>
+              <a:t>演讲口径</a:t>
             </a:r>
           </a:p>
         </p:txBody>
@@ -4107,8 +4141,8 @@
         </p:nvSpPr>
         <p:spPr>
           <a:xfrm>
-            <a:off x="2386584" y="5413248"/>
-            <a:ext cx="1664208" cy="292608"/>
+            <a:off x="2331719" y="5340096"/>
+            <a:ext cx="1709927" cy="365760"/>
           </a:xfrm>
           <a:prstGeom prst="rect">
             <a:avLst/>
@@ -4123,14 +4157,14 @@
           <a:p>
             <a:pPr algn="l"/>
             <a:r>
-              <a:rPr sz="1400" b="1">
+              <a:rPr sz="1200" b="1">
                 <a:solidFill>
                   <a:srgbClr val="8B1A2B"/>
                 </a:solidFill>
                 <a:latin typeface="Microsoft YaHei"/>
                 <a:ea typeface="Microsoft YaHei"/>
               </a:rPr>
-              <a:t>82% 容器用户生产部署 K8s</a:t>
+              <a:t>66% 组织用 K8s 托管 GenAI（CNCF 2025）</a:t>
             </a:r>
           </a:p>
         </p:txBody>
@@ -4143,8 +4177,8 @@
         </p:nvSpPr>
         <p:spPr>
           <a:xfrm>
-            <a:off x="4233672" y="4910328"/>
-            <a:ext cx="1847088" cy="868680"/>
+            <a:off x="4206238" y="4809744"/>
+            <a:ext cx="1874519" cy="960120"/>
           </a:xfrm>
           <a:prstGeom prst="rect">
             <a:avLst/>
@@ -4188,8 +4222,8 @@
         </p:nvSpPr>
         <p:spPr>
           <a:xfrm>
-            <a:off x="4343400" y="4965192"/>
-            <a:ext cx="1664208" cy="201168"/>
+            <a:off x="4297678" y="4864608"/>
+            <a:ext cx="1709927" cy="201168"/>
           </a:xfrm>
           <a:prstGeom prst="rect">
             <a:avLst/>
@@ -4211,7 +4245,7 @@
                 <a:latin typeface="Microsoft YaHei"/>
                 <a:ea typeface="Microsoft YaHei"/>
               </a:rPr>
-              <a:t>容器服务 Agent：…</a:t>
+              <a:t>超大规模集群运维四关注点与行业背景·2</a:t>
             </a:r>
           </a:p>
         </p:txBody>
@@ -4224,8 +4258,8 @@
         </p:nvSpPr>
         <p:spPr>
           <a:xfrm>
-            <a:off x="4343400" y="5166360"/>
-            <a:ext cx="1664208" cy="237744"/>
+            <a:off x="4297678" y="5065776"/>
+            <a:ext cx="1709927" cy="256032"/>
           </a:xfrm>
           <a:prstGeom prst="rect">
             <a:avLst/>
@@ -4247,7 +4281,7 @@
                 <a:latin typeface="Microsoft YaHei"/>
                 <a:ea typeface="Microsoft YaHei"/>
               </a:rPr>
-              <a:t>根因分析准确率 &gt;90%</a:t>
+              <a:t>演讲口径</a:t>
             </a:r>
           </a:p>
         </p:txBody>
@@ -4260,8 +4294,8 @@
         </p:nvSpPr>
         <p:spPr>
           <a:xfrm>
-            <a:off x="4343400" y="5413248"/>
-            <a:ext cx="1664208" cy="292608"/>
+            <a:off x="4297678" y="5340096"/>
+            <a:ext cx="1709927" cy="365760"/>
           </a:xfrm>
           <a:prstGeom prst="rect">
             <a:avLst/>
@@ -4276,14 +4310,14 @@
           <a:p>
             <a:pPr algn="l"/>
             <a:r>
-              <a:rPr sz="1400" b="1">
+              <a:rPr sz="1200" b="1">
                 <a:solidFill>
                   <a:srgbClr val="8B1A2B"/>
                 </a:solidFill>
                 <a:latin typeface="Microsoft YaHei"/>
                 <a:ea typeface="Microsoft YaHei"/>
               </a:rPr>
-              <a:t>任务完成率 &gt;85%</a:t>
+              <a:t>82% 容器用户生产部署 K8s</a:t>
             </a:r>
           </a:p>
         </p:txBody>
@@ -4296,8 +4330,8 @@
         </p:nvSpPr>
         <p:spPr>
           <a:xfrm>
-            <a:off x="6190488" y="4910328"/>
-            <a:ext cx="1847088" cy="868680"/>
+            <a:off x="6172197" y="4809744"/>
+            <a:ext cx="1874519" cy="960120"/>
           </a:xfrm>
           <a:prstGeom prst="rect">
             <a:avLst/>
@@ -4341,8 +4375,8 @@
         </p:nvSpPr>
         <p:spPr>
           <a:xfrm>
-            <a:off x="6300216" y="4965192"/>
-            <a:ext cx="1664208" cy="201168"/>
+            <a:off x="6263637" y="4864608"/>
+            <a:ext cx="1709927" cy="201168"/>
           </a:xfrm>
           <a:prstGeom prst="rect">
             <a:avLst/>
@@ -4364,7 +4398,7 @@
                 <a:latin typeface="Microsoft YaHei"/>
                 <a:ea typeface="Microsoft YaHei"/>
               </a:rPr>
-              <a:t>PLAN · SENS…</a:t>
+              <a:t>超大规模集群运维四关注点与行业背景·3</a:t>
             </a:r>
           </a:p>
         </p:txBody>
@@ -4377,8 +4411,8 @@
         </p:nvSpPr>
         <p:spPr>
           <a:xfrm>
-            <a:off x="6300216" y="5166360"/>
-            <a:ext cx="1664208" cy="237744"/>
+            <a:off x="6263637" y="5065776"/>
+            <a:ext cx="1709927" cy="256032"/>
           </a:xfrm>
           <a:prstGeom prst="rect">
             <a:avLst/>
@@ -4400,7 +4434,7 @@
                 <a:latin typeface="Microsoft YaHei"/>
                 <a:ea typeface="Microsoft YaHei"/>
               </a:rPr>
-              <a:t>PLAN：辅助架构规划、生成部…</a:t>
+              <a:t>演讲口径</a:t>
             </a:r>
           </a:p>
         </p:txBody>
@@ -4413,8 +4447,8 @@
         </p:nvSpPr>
         <p:spPr>
           <a:xfrm>
-            <a:off x="6300216" y="5413248"/>
-            <a:ext cx="1664208" cy="292608"/>
+            <a:off x="6263637" y="5340096"/>
+            <a:ext cx="1709927" cy="365760"/>
           </a:xfrm>
           <a:prstGeom prst="rect">
             <a:avLst/>
@@ -4429,14 +4463,14 @@
           <a:p>
             <a:pPr algn="l"/>
             <a:r>
-              <a:rPr sz="1400" b="1">
+              <a:rPr sz="1200" b="1">
                 <a:solidFill>
                   <a:srgbClr val="8B1A2B"/>
                 </a:solidFill>
                 <a:latin typeface="Microsoft YaHei"/>
                 <a:ea typeface="Microsoft YaHei"/>
               </a:rPr>
-              <a:t>执行形态：沙箱隔离 + 人工确认 …</a:t>
+              <a:t>97% 组织近一年遭遇安全事件（引用调研）</a:t>
             </a:r>
           </a:p>
         </p:txBody>
@@ -4449,8 +4483,8 @@
         </p:nvSpPr>
         <p:spPr>
           <a:xfrm>
-            <a:off x="8147304" y="4910328"/>
-            <a:ext cx="1847088" cy="868680"/>
+            <a:off x="8138156" y="4809744"/>
+            <a:ext cx="1874519" cy="960120"/>
           </a:xfrm>
           <a:prstGeom prst="rect">
             <a:avLst/>
@@ -4494,8 +4528,8 @@
         </p:nvSpPr>
         <p:spPr>
           <a:xfrm>
-            <a:off x="8257032" y="4965192"/>
-            <a:ext cx="1664208" cy="201168"/>
+            <a:off x="8229596" y="4864608"/>
+            <a:ext cx="1709927" cy="201168"/>
           </a:xfrm>
           <a:prstGeom prst="rect">
             <a:avLst/>
@@ -4517,7 +4551,7 @@
                 <a:latin typeface="Microsoft YaHei"/>
                 <a:ea typeface="Microsoft YaHei"/>
               </a:rPr>
-              <a:t>全生命周期智能纳管：D…</a:t>
+              <a:t>自主智能运维架构</a:t>
             </a:r>
           </a:p>
         </p:txBody>
@@ -4530,8 +4564,8 @@
         </p:nvSpPr>
         <p:spPr>
           <a:xfrm>
-            <a:off x="8257032" y="5166360"/>
-            <a:ext cx="1664208" cy="237744"/>
+            <a:off x="8229596" y="5065776"/>
+            <a:ext cx="1709927" cy="256032"/>
           </a:xfrm>
           <a:prstGeom prst="rect">
             <a:avLst/>
@@ -4553,7 +4587,7 @@
                 <a:latin typeface="Microsoft YaHei"/>
                 <a:ea typeface="Microsoft YaHei"/>
               </a:rPr>
-              <a:t>Day0 集群设计：按业务生成…</a:t>
+              <a:t>演讲口径</a:t>
             </a:r>
           </a:p>
         </p:txBody>
@@ -4566,8 +4600,8 @@
         </p:nvSpPr>
         <p:spPr>
           <a:xfrm>
-            <a:off x="8257032" y="5413248"/>
-            <a:ext cx="1664208" cy="292608"/>
+            <a:off x="8229596" y="5340096"/>
+            <a:ext cx="1709927" cy="365760"/>
           </a:xfrm>
           <a:prstGeom prst="rect">
             <a:avLst/>
@@ -4582,14 +4616,14 @@
           <a:p>
             <a:pPr algn="l"/>
             <a:r>
-              <a:rPr sz="1400" b="1">
+              <a:rPr sz="1200" b="1">
                 <a:solidFill>
                   <a:srgbClr val="8B1A2B"/>
                 </a:solidFill>
                 <a:latin typeface="Microsoft YaHei"/>
                 <a:ea typeface="Microsoft YaHei"/>
               </a:rPr>
-              <a:t>覆盖：设计 / 部署 / 运维 /…</a:t>
+              <a:t>200+ 异常分析覆盖</a:t>
             </a:r>
           </a:p>
         </p:txBody>
@@ -4602,8 +4636,8 @@
         </p:nvSpPr>
         <p:spPr>
           <a:xfrm>
-            <a:off x="10104120" y="4910328"/>
-            <a:ext cx="1847088" cy="868680"/>
+            <a:off x="10104115" y="4809744"/>
+            <a:ext cx="1874519" cy="960120"/>
           </a:xfrm>
           <a:prstGeom prst="rect">
             <a:avLst/>
@@ -4647,8 +4681,8 @@
         </p:nvSpPr>
         <p:spPr>
           <a:xfrm>
-            <a:off x="10213848" y="4965192"/>
-            <a:ext cx="1664208" cy="201168"/>
+            <a:off x="10195555" y="4864608"/>
+            <a:ext cx="1709927" cy="201168"/>
           </a:xfrm>
           <a:prstGeom prst="rect">
             <a:avLst/>
@@ -4670,7 +4704,7 @@
                 <a:latin typeface="Microsoft YaHei"/>
                 <a:ea typeface="Microsoft YaHei"/>
               </a:rPr>
-              <a:t>能力全景：MCP、知识…</a:t>
+              <a:t>自主智能运维架构·2</a:t>
             </a:r>
           </a:p>
         </p:txBody>
@@ -4683,8 +4717,8 @@
         </p:nvSpPr>
         <p:spPr>
           <a:xfrm>
-            <a:off x="10213848" y="5166360"/>
-            <a:ext cx="1664208" cy="237744"/>
+            <a:off x="10195555" y="5065776"/>
+            <a:ext cx="1709927" cy="256032"/>
           </a:xfrm>
           <a:prstGeom prst="rect">
             <a:avLst/>
@@ -4706,7 +4740,7 @@
                 <a:latin typeface="Microsoft YaHei"/>
                 <a:ea typeface="Microsoft YaHei"/>
               </a:rPr>
-              <a:t>观测：SysOM + eBPF…</a:t>
+              <a:t>演讲口径</a:t>
             </a:r>
           </a:p>
         </p:txBody>
@@ -4719,8 +4753,8 @@
         </p:nvSpPr>
         <p:spPr>
           <a:xfrm>
-            <a:off x="10213848" y="5413248"/>
-            <a:ext cx="1664208" cy="292608"/>
+            <a:off x="10195555" y="5340096"/>
+            <a:ext cx="1709927" cy="365760"/>
           </a:xfrm>
           <a:prstGeom prst="rect">
             <a:avLst/>
@@ -4735,14 +4769,14 @@
           <a:p>
             <a:pPr algn="l"/>
             <a:r>
-              <a:rPr sz="1400" b="1">
+              <a:rPr sz="1200" b="1">
                 <a:solidFill>
                   <a:srgbClr val="8B1A2B"/>
                 </a:solidFill>
                 <a:latin typeface="Microsoft YaHei"/>
                 <a:ea typeface="Microsoft YaHei"/>
               </a:rPr>
-              <a:t>ack-mcp-server 开源</a:t>
+              <a:t>根因分析准确率 &gt;90%</a:t>
             </a:r>
           </a:p>
         </p:txBody>
@@ -4755,8 +4789,8 @@
         </p:nvSpPr>
         <p:spPr>
           <a:xfrm>
-            <a:off x="0" y="5989320"/>
-            <a:ext cx="12191695" cy="868680"/>
+            <a:off x="0" y="5870448"/>
+            <a:ext cx="12191695" cy="987552"/>
           </a:xfrm>
           <a:prstGeom prst="rect">
             <a:avLst/>
@@ -4798,8 +4832,8 @@
         </p:nvSpPr>
         <p:spPr>
           <a:xfrm>
-            <a:off x="365760" y="6080760"/>
-            <a:ext cx="11430000" cy="256032"/>
+            <a:off x="320040" y="5943600"/>
+            <a:ext cx="11521440" cy="502920"/>
           </a:xfrm>
           <a:prstGeom prst="rect">
             <a:avLst/>
@@ -4814,14 +4848,14 @@
           <a:p>
             <a:pPr algn="l"/>
             <a:r>
-              <a:rPr sz="1200" b="1">
+              <a:rPr sz="1100" b="1">
                 <a:solidFill>
                   <a:srgbClr val="1A1A1A"/>
                 </a:solidFill>
                 <a:latin typeface="Microsoft YaHei"/>
                 <a:ea typeface="Microsoft YaHei"/>
               </a:rPr>
-              <a:t>可落地动作：容器运维 Agent 是「工具 MCP + 领域知识 + 护栏」工程，不是单纯对话机器人。；Day0–N 分期与 Human-in-Loop 是政企专属云可接受的落地路径。</a:t>
+              <a:t>可落地动作：容器运维 Agent 是「工具 MCP + 领域知识 + 护栏」工程，不是单纯对话机器人；Day0–N 分期与 Human-in-Loop 是政企专属云可接受的落地路径；分钟级闭环与 &gt;80% 客户渗透（演讲披露）表明该能力已进入规模化，HCS 需尽快形成可对标方案。</a:t>
             </a:r>
           </a:p>
         </p:txBody>
@@ -4834,8 +4868,8 @@
         </p:nvSpPr>
         <p:spPr>
           <a:xfrm>
-            <a:off x="365760" y="6373368"/>
-            <a:ext cx="11430000" cy="256032"/>
+            <a:off x="320040" y="6437376"/>
+            <a:ext cx="11521440" cy="256032"/>
           </a:xfrm>
           <a:prstGeom prst="rect">
             <a:avLst/>
@@ -4850,7 +4884,7 @@
           <a:p>
             <a:pPr algn="l"/>
             <a:r>
-              <a:rPr sz="1000" b="0">
+              <a:rPr sz="900" b="0">
                 <a:solidFill>
                   <a:srgbClr val="6B6B6B"/>
                 </a:solidFill>
@@ -5092,7 +5126,7 @@
         <p:spPr>
           <a:xfrm>
             <a:off x="429768" y="1143000"/>
-            <a:ext cx="3496970" cy="292608"/>
+            <a:ext cx="3496970" cy="384048"/>
           </a:xfrm>
           <a:prstGeom prst="rect">
             <a:avLst/>
@@ -5135,7 +5169,7 @@
         </p:blipFill>
         <p:spPr>
           <a:xfrm>
-            <a:off x="429768" y="1928092"/>
+            <a:off x="429768" y="1946380"/>
             <a:ext cx="3496970" cy="2965239"/>
           </a:xfrm>
           <a:prstGeom prst="rect">
@@ -5233,7 +5267,7 @@
         <p:spPr>
           <a:xfrm>
             <a:off x="4347362" y="1143000"/>
-            <a:ext cx="3496970" cy="292608"/>
+            <a:ext cx="3496970" cy="384048"/>
           </a:xfrm>
           <a:prstGeom prst="rect">
             <a:avLst/>
@@ -5255,7 +5289,7 @@
                 <a:latin typeface="Microsoft YaHei"/>
                 <a:ea typeface="Microsoft YaHei"/>
               </a:rPr>
-              <a:t>82% 容器用户生产部署 K8s</a:t>
+              <a:t>66% 组织用 K8s 托管 GenAI（CNCF 2025） · 82% 容器用户生产部署 K8s</a:t>
             </a:r>
           </a:p>
         </p:txBody>
@@ -5276,7 +5310,7 @@
         </p:blipFill>
         <p:spPr>
           <a:xfrm>
-            <a:off x="4347362" y="1928092"/>
+            <a:off x="4347362" y="1946380"/>
             <a:ext cx="3496970" cy="2965239"/>
           </a:xfrm>
           <a:prstGeom prst="rect">
@@ -5374,7 +5408,7 @@
         <p:spPr>
           <a:xfrm>
             <a:off x="8264956" y="1143000"/>
-            <a:ext cx="3496970" cy="292608"/>
+            <a:ext cx="3496970" cy="384048"/>
           </a:xfrm>
           <a:prstGeom prst="rect">
             <a:avLst/>
@@ -5396,7 +5430,7 @@
                 <a:latin typeface="Microsoft YaHei"/>
                 <a:ea typeface="Microsoft YaHei"/>
               </a:rPr>
-              <a:t>任务完成率 &gt;85%</a:t>
+              <a:t>200+ 异常分析覆盖 · 根因分析准确率 &gt;90%</a:t>
             </a:r>
           </a:p>
         </p:txBody>
@@ -5417,7 +5451,7 @@
         </p:blipFill>
         <p:spPr>
           <a:xfrm>
-            <a:off x="8264956" y="1928092"/>
+            <a:off x="8264956" y="1946380"/>
             <a:ext cx="3496970" cy="2965239"/>
           </a:xfrm>
           <a:prstGeom prst="rect">

--- a/yunqi-2026-agenda-201/docs/洞察一页-09-容器服务 Agent 服务全场景最佳实践.pptx
+++ b/yunqi-2026-agenda-201/docs/洞察一页-09-容器服务 Agent 服务全场景最佳实践.pptx
@@ -3323,7 +3323,7 @@
                 <a:latin typeface="Microsoft YaHei"/>
                 <a:ea typeface="Microsoft YaHei"/>
               </a:rPr>
-              <a:t>一句话判断：胡光介绍容器服务 Agent：面向 Kubernetes 的自主智能运维，覆盖 Day0 集群设计到 DayN 自治协同全生命周期。</a:t>
+              <a:t>一句话判断：阿里云 ACK——面向 Kubernetes 的自主智能运维，覆盖 Day0 集群设计到 DayN 自治协同全生命周期。</a:t>
             </a:r>
           </a:p>
         </p:txBody>
@@ -3444,7 +3444,7 @@
                 <a:latin typeface="Microsoft YaHei"/>
                 <a:ea typeface="Microsoft YaHei"/>
               </a:rPr>
-              <a:t>HCS 应把「容器运维 Agent」列为独立产品能力，对标客户超大规模集群运维痛点（稳定/自动/安全/成本），避免只做通用大模型对话入口。</a:t>
+              <a:t>需要把「容器运维 Agent」列为独立产品能力，对标客户超大规模集群运维痛点（稳定/自动/安全/成本），避免只做通用大模型对话入口。</a:t>
             </a:r>
           </a:p>
           <a:p>
@@ -3599,7 +3599,7 @@
                 <a:latin typeface="Microsoft YaHei"/>
                 <a:ea typeface="Microsoft YaHei"/>
               </a:rPr>
-              <a:t>规划输入可直接采用「稳定/自动/安全/成本」四象限作为 HCS 运维 Agent 需求基线</a:t>
+              <a:t>规划输入可直接采用「稳定/自动/安全/成本」四象限作为 运维 Agent 需求基线</a:t>
             </a:r>
           </a:p>
           <a:p>
@@ -3771,7 +3771,7 @@
                 <a:latin typeface="Microsoft YaHei"/>
                 <a:ea typeface="Microsoft YaHei"/>
               </a:rPr>
-              <a:t>HCS 应建设「MCP 工具集 + 领域知识库 + 护栏审批」三段式运维 Agent</a:t>
+              <a:t>建设「MCP 工具集 + 领域知识库 + 护栏审批」三段式运维 Agent</a:t>
             </a:r>
           </a:p>
           <a:p>
@@ -3939,7 +3939,7 @@
                 <a:latin typeface="Microsoft YaHei"/>
                 <a:ea typeface="Microsoft YaHei"/>
               </a:rPr>
-              <a:t>定位</a:t>
+              <a:t>MTTR ↓</a:t>
             </a:r>
           </a:p>
         </p:txBody>
@@ -3975,7 +3975,7 @@
                 <a:latin typeface="Microsoft YaHei"/>
                 <a:ea typeface="Microsoft YaHei"/>
               </a:rPr>
-              <a:t>演讲口径</a:t>
+              <a:t>钉钉移动端分钟级自治闭环</a:t>
             </a:r>
           </a:p>
         </p:txBody>
@@ -4011,7 +4011,7 @@
                 <a:latin typeface="Microsoft YaHei"/>
                 <a:ea typeface="Microsoft YaHei"/>
               </a:rPr>
-              <a:t>全场景容器运维 Agent</a:t>
+              <a:t>65%</a:t>
             </a:r>
           </a:p>
         </p:txBody>
@@ -4092,7 +4092,7 @@
                 <a:latin typeface="Microsoft YaHei"/>
                 <a:ea typeface="Microsoft YaHei"/>
               </a:rPr>
-              <a:t>超大规模集群运维四关注点与行业背景</a:t>
+              <a:t>任务完成率 &gt;</a:t>
             </a:r>
           </a:p>
         </p:txBody>
@@ -4128,7 +4128,7 @@
                 <a:latin typeface="Microsoft YaHei"/>
                 <a:ea typeface="Microsoft YaHei"/>
               </a:rPr>
-              <a:t>演讲口径</a:t>
+              <a:t>自主智能运维架构</a:t>
             </a:r>
           </a:p>
         </p:txBody>
@@ -4164,7 +4164,7 @@
                 <a:latin typeface="Microsoft YaHei"/>
                 <a:ea typeface="Microsoft YaHei"/>
               </a:rPr>
-              <a:t>66% 组织用 K8s 托管 GenAI（CNCF 2025）</a:t>
+              <a:t>85%</a:t>
             </a:r>
           </a:p>
         </p:txBody>
@@ -4245,7 +4245,7 @@
                 <a:latin typeface="Microsoft YaHei"/>
                 <a:ea typeface="Microsoft YaHei"/>
               </a:rPr>
-              <a:t>超大规模集群运维四关注点与行业背景·2</a:t>
+              <a:t>钉钉移动端分钟级自治闭环</a:t>
             </a:r>
           </a:p>
         </p:txBody>
@@ -4281,7 +4281,7 @@
                 <a:latin typeface="Microsoft YaHei"/>
                 <a:ea typeface="Microsoft YaHei"/>
               </a:rPr>
-              <a:t>演讲口径</a:t>
+              <a:t>关键能力</a:t>
             </a:r>
           </a:p>
         </p:txBody>
@@ -4317,7 +4317,7 @@
                 <a:latin typeface="Microsoft YaHei"/>
                 <a:ea typeface="Microsoft YaHei"/>
               </a:rPr>
-              <a:t>82% 容器用户生产部署 K8s</a:t>
+              <a:t>86% 任务移动端处理</a:t>
             </a:r>
           </a:p>
         </p:txBody>
@@ -4398,7 +4398,7 @@
                 <a:latin typeface="Microsoft YaHei"/>
                 <a:ea typeface="Microsoft YaHei"/>
               </a:rPr>
-              <a:t>超大规模集群运维四关注点与行业背景·3</a:t>
+              <a:t>根因分析准确率 &gt;</a:t>
             </a:r>
           </a:p>
         </p:txBody>
@@ -4434,7 +4434,7 @@
                 <a:latin typeface="Microsoft YaHei"/>
                 <a:ea typeface="Microsoft YaHei"/>
               </a:rPr>
-              <a:t>演讲口径</a:t>
+              <a:t>自主智能运维架构</a:t>
             </a:r>
           </a:p>
         </p:txBody>
@@ -4470,7 +4470,7 @@
                 <a:latin typeface="Microsoft YaHei"/>
                 <a:ea typeface="Microsoft YaHei"/>
               </a:rPr>
-              <a:t>97% 组织近一年遭遇安全事件（引用调研）</a:t>
+              <a:t>90%</a:t>
             </a:r>
           </a:p>
         </p:txBody>
@@ -4551,7 +4551,7 @@
                 <a:latin typeface="Microsoft YaHei"/>
                 <a:ea typeface="Microsoft YaHei"/>
               </a:rPr>
-              <a:t>自主智能运维架构</a:t>
+              <a:t>钉钉移动端分钟级自治闭环</a:t>
             </a:r>
           </a:p>
         </p:txBody>
@@ -4587,7 +4587,7 @@
                 <a:latin typeface="Microsoft YaHei"/>
                 <a:ea typeface="Microsoft YaHei"/>
               </a:rPr>
-              <a:t>演讲口径</a:t>
+              <a:t>关键能力</a:t>
             </a:r>
           </a:p>
         </p:txBody>
@@ -4623,7 +4623,7 @@
                 <a:latin typeface="Microsoft YaHei"/>
                 <a:ea typeface="Microsoft YaHei"/>
               </a:rPr>
-              <a:t>200+ 异常分析覆盖</a:t>
+              <a:t>高风险变更 100% 人工确认</a:t>
             </a:r>
           </a:p>
         </p:txBody>
@@ -4704,7 +4704,7 @@
                 <a:latin typeface="Microsoft YaHei"/>
                 <a:ea typeface="Microsoft YaHei"/>
               </a:rPr>
-              <a:t>自主智能运维架构·2</a:t>
+              <a:t>超大规模集群运维四关注点与行业背景</a:t>
             </a:r>
           </a:p>
         </p:txBody>
@@ -4740,7 +4740,7 @@
                 <a:latin typeface="Microsoft YaHei"/>
                 <a:ea typeface="Microsoft YaHei"/>
               </a:rPr>
-              <a:t>演讲口径</a:t>
+              <a:t>关键能力</a:t>
             </a:r>
           </a:p>
         </p:txBody>
@@ -4776,7 +4776,7 @@
                 <a:latin typeface="Microsoft YaHei"/>
                 <a:ea typeface="Microsoft YaHei"/>
               </a:rPr>
-              <a:t>根因分析准确率 &gt;90%</a:t>
+              <a:t>82% 容器用户生产部署 K8s</a:t>
             </a:r>
           </a:p>
         </p:txBody>
@@ -4855,7 +4855,7 @@
                 <a:latin typeface="Microsoft YaHei"/>
                 <a:ea typeface="Microsoft YaHei"/>
               </a:rPr>
-              <a:t>可落地动作：容器运维 Agent 是「工具 MCP + 领域知识 + 护栏」工程，不是单纯对话机器人；Day0–N 分期与 Human-in-Loop 是政企专属云可接受的落地路径；分钟级闭环与 &gt;80% 客户渗透（演讲披露）表明该能力已进入规模化，HCS 需尽快形成可对标方案。</a:t>
+              <a:t>启示要点：容器运维 Agent 是「工具 MCP + 领域知识 + 护栏」工程，不是单纯对话机器人；Day0–N 分期与 Human-in-Loop 是政企专属云可接受的落地路径；分钟级闭环与 &gt;80% 客户渗透（演讲披露）表明该能力已进入规模化， 需尽快形成可对标方案。</a:t>
             </a:r>
           </a:p>
         </p:txBody>
@@ -4891,7 +4891,7 @@
                 <a:latin typeface="Microsoft YaHei"/>
                 <a:ea typeface="Microsoft YaHei"/>
               </a:rPr>
-              <a:t>来源：https://yunqi.aliyun.com/2026/session?agendaId=201 · Talk 09 胡光  ·  视角：HCS 技术规划</a:t>
+              <a:t>来源：https://yunqi.aliyun.com/2026/session?agendaId=201 · Talk 09 胡光</a:t>
             </a:r>
           </a:p>
         </p:txBody>
